--- a/Reporte 210526.pptx
+++ b/Reporte 210526.pptx
@@ -5,7 +5,7 @@
     <p:sldMasterId id="2147483672" r:id="rId1"/>
   </p:sldMasterIdLst>
   <p:notesMasterIdLst>
-    <p:notesMasterId r:id="rId17"/>
+    <p:notesMasterId r:id="rId18"/>
   </p:notesMasterIdLst>
   <p:sldIdLst>
     <p:sldId id="350" r:id="rId2"/>
@@ -22,23 +22,24 @@
     <p:sldId id="361" r:id="rId13"/>
     <p:sldId id="371" r:id="rId14"/>
     <p:sldId id="384" r:id="rId15"/>
-    <p:sldId id="280" r:id="rId16"/>
+    <p:sldId id="397" r:id="rId16"/>
+    <p:sldId id="280" r:id="rId17"/>
   </p:sldIdLst>
   <p:sldSz cx="9144000" cy="5143500" type="screen16x9"/>
   <p:notesSz cx="6858000" cy="9144000"/>
   <p:embeddedFontLst>
     <p:embeddedFont>
-      <p:font typeface="Montserrat" pitchFamily="2" charset="0"/>
-      <p:regular r:id="rId18"/>
-      <p:bold r:id="rId19"/>
-      <p:italic r:id="rId20"/>
-      <p:boldItalic r:id="rId21"/>
+      <p:font typeface="Montserrat" panose="00000500000000000000" pitchFamily="2" charset="0"/>
+      <p:regular r:id="rId19"/>
+      <p:bold r:id="rId20"/>
+      <p:italic r:id="rId21"/>
+      <p:boldItalic r:id="rId22"/>
     </p:embeddedFont>
     <p:embeddedFont>
-      <p:font typeface="Montserrat Black" pitchFamily="2" charset="0"/>
-      <p:bold r:id="rId22"/>
-      <p:italic r:id="rId23"/>
-      <p:boldItalic r:id="rId24"/>
+      <p:font typeface="Montserrat Black" panose="00000A00000000000000" pitchFamily="2" charset="0"/>
+      <p:bold r:id="rId23"/>
+      <p:italic r:id="rId24"/>
+      <p:boldItalic r:id="rId25"/>
     </p:embeddedFont>
   </p:embeddedFontLst>
   <p:defaultTextStyle>
@@ -6293,10 +6294,10 @@
       </p:sp>
       <p:pic>
         <p:nvPicPr>
-          <p:cNvPr id="4" name="Imagen 3">
+          <p:cNvPr id="3" name="Imagen 2">
             <a:extLst>
               <a:ext uri="{FF2B5EF4-FFF2-40B4-BE49-F238E27FC236}">
-                <a16:creationId xmlns:a16="http://schemas.microsoft.com/office/drawing/2014/main" id="{29EC7FF1-A0EB-1117-AFFD-010733CE347B}"/>
+                <a16:creationId xmlns:a16="http://schemas.microsoft.com/office/drawing/2014/main" id="{C33F51A5-DDE1-50DF-8428-6CC2995A3892}"/>
               </a:ext>
             </a:extLst>
           </p:cNvPr>
@@ -6313,8 +6314,8 @@
         </p:blipFill>
         <p:spPr>
           <a:xfrm>
-            <a:off x="0" y="1284854"/>
-            <a:ext cx="9144000" cy="2573792"/>
+            <a:off x="0" y="943956"/>
+            <a:ext cx="9144000" cy="3255588"/>
           </a:xfrm>
           <a:prstGeom prst="rect">
             <a:avLst/>
@@ -6397,10 +6398,10 @@
       </p:sp>
       <p:pic>
         <p:nvPicPr>
-          <p:cNvPr id="3" name="Imagen 2">
+          <p:cNvPr id="4" name="Imagen 3">
             <a:extLst>
               <a:ext uri="{FF2B5EF4-FFF2-40B4-BE49-F238E27FC236}">
-                <a16:creationId xmlns:a16="http://schemas.microsoft.com/office/drawing/2014/main" id="{5D7BCF6E-2696-F1FC-3D9A-A77C9C94DF32}"/>
+                <a16:creationId xmlns:a16="http://schemas.microsoft.com/office/drawing/2014/main" id="{66BA0171-71BA-F3F5-3C7D-9DAC76487538}"/>
               </a:ext>
             </a:extLst>
           </p:cNvPr>
@@ -6417,8 +6418,8 @@
         </p:blipFill>
         <p:spPr>
           <a:xfrm>
-            <a:off x="0" y="952794"/>
-            <a:ext cx="9144000" cy="3237912"/>
+            <a:off x="39088" y="369332"/>
+            <a:ext cx="8992800" cy="4684714"/>
           </a:xfrm>
           <a:prstGeom prst="rect">
             <a:avLst/>
@@ -6495,10 +6496,10 @@
       </p:sp>
       <p:pic>
         <p:nvPicPr>
-          <p:cNvPr id="5" name="Imagen 4">
+          <p:cNvPr id="4" name="Imagen 3">
             <a:extLst>
               <a:ext uri="{FF2B5EF4-FFF2-40B4-BE49-F238E27FC236}">
-                <a16:creationId xmlns:a16="http://schemas.microsoft.com/office/drawing/2014/main" id="{6A3AFB75-EEAE-4107-B871-818116FA16DE}"/>
+                <a16:creationId xmlns:a16="http://schemas.microsoft.com/office/drawing/2014/main" id="{DA05E811-CCE8-7076-8FB3-468242175B2C}"/>
               </a:ext>
             </a:extLst>
           </p:cNvPr>
@@ -6515,8 +6516,8 @@
         </p:blipFill>
         <p:spPr>
           <a:xfrm>
-            <a:off x="0" y="1218397"/>
-            <a:ext cx="9144000" cy="2706705"/>
+            <a:off x="0" y="854375"/>
+            <a:ext cx="9144000" cy="3434750"/>
           </a:xfrm>
           <a:prstGeom prst="rect">
             <a:avLst/>
@@ -6593,10 +6594,10 @@
       </p:sp>
       <p:pic>
         <p:nvPicPr>
-          <p:cNvPr id="3" name="Imagen 2">
+          <p:cNvPr id="4" name="Imagen 3">
             <a:extLst>
               <a:ext uri="{FF2B5EF4-FFF2-40B4-BE49-F238E27FC236}">
-                <a16:creationId xmlns:a16="http://schemas.microsoft.com/office/drawing/2014/main" id="{0B8C4A5C-A162-5CA4-F8C3-26E66CF4564A}"/>
+                <a16:creationId xmlns:a16="http://schemas.microsoft.com/office/drawing/2014/main" id="{57D6A1AC-C962-D859-2201-FBFEE06489EC}"/>
               </a:ext>
             </a:extLst>
           </p:cNvPr>
@@ -6613,8 +6614,8 @@
         </p:blipFill>
         <p:spPr>
           <a:xfrm>
-            <a:off x="0" y="545637"/>
-            <a:ext cx="9144000" cy="4052225"/>
+            <a:off x="0" y="1259985"/>
+            <a:ext cx="9144000" cy="2623530"/>
           </a:xfrm>
           <a:prstGeom prst="rect">
             <a:avLst/>
@@ -6691,10 +6692,10 @@
       </p:sp>
       <p:pic>
         <p:nvPicPr>
-          <p:cNvPr id="3" name="Imagen 2">
+          <p:cNvPr id="5" name="Imagen 4">
             <a:extLst>
               <a:ext uri="{FF2B5EF4-FFF2-40B4-BE49-F238E27FC236}">
-                <a16:creationId xmlns:a16="http://schemas.microsoft.com/office/drawing/2014/main" id="{C204D9B2-2A48-E212-D473-22D6FB14F27E}"/>
+                <a16:creationId xmlns:a16="http://schemas.microsoft.com/office/drawing/2014/main" id="{03B99167-0C91-5F35-95A4-1D103F6FE951}"/>
               </a:ext>
             </a:extLst>
           </p:cNvPr>
@@ -6711,8 +6712,8 @@
         </p:blipFill>
         <p:spPr>
           <a:xfrm>
-            <a:off x="813863" y="737931"/>
-            <a:ext cx="7516274" cy="3667637"/>
+            <a:off x="0" y="1186986"/>
+            <a:ext cx="9144000" cy="2769528"/>
           </a:xfrm>
           <a:prstGeom prst="rect">
             <a:avLst/>
@@ -6733,6 +6734,110 @@
 </file>
 
 <file path=ppt/slides/slide15.xml><?xml version="1.0" encoding="utf-8"?>
+<p:sld xmlns:a="http://schemas.openxmlformats.org/drawingml/2006/main" xmlns:r="http://schemas.openxmlformats.org/officeDocument/2006/relationships" xmlns:p="http://schemas.openxmlformats.org/presentationml/2006/main">
+  <p:cSld>
+    <p:spTree>
+      <p:nvGrpSpPr>
+        <p:cNvPr id="1" name="">
+          <a:extLst>
+            <a:ext uri="{FF2B5EF4-FFF2-40B4-BE49-F238E27FC236}">
+              <a16:creationId xmlns:a16="http://schemas.microsoft.com/office/drawing/2014/main" id="{B3066DA7-1654-05B4-66BE-9EA722EFE367}"/>
+            </a:ext>
+          </a:extLst>
+        </p:cNvPr>
+        <p:cNvGrpSpPr/>
+        <p:nvPr/>
+      </p:nvGrpSpPr>
+      <p:grpSpPr>
+        <a:xfrm>
+          <a:off x="0" y="0"/>
+          <a:ext cx="0" cy="0"/>
+          <a:chOff x="0" y="0"/>
+          <a:chExt cx="0" cy="0"/>
+        </a:xfrm>
+      </p:grpSpPr>
+      <p:sp>
+        <p:nvSpPr>
+          <p:cNvPr id="4" name="CuadroTexto 3">
+            <a:extLst>
+              <a:ext uri="{FF2B5EF4-FFF2-40B4-BE49-F238E27FC236}">
+                <a16:creationId xmlns:a16="http://schemas.microsoft.com/office/drawing/2014/main" id="{C82DF43C-D1A9-76A9-3E15-6BB25CE18BC6}"/>
+              </a:ext>
+            </a:extLst>
+          </p:cNvPr>
+          <p:cNvSpPr txBox="1"/>
+          <p:nvPr/>
+        </p:nvSpPr>
+        <p:spPr>
+          <a:xfrm>
+            <a:off x="1926166" y="0"/>
+            <a:ext cx="5291667" cy="307777"/>
+          </a:xfrm>
+          <a:prstGeom prst="rect">
+            <a:avLst/>
+          </a:prstGeom>
+          <a:noFill/>
+        </p:spPr>
+        <p:txBody>
+          <a:bodyPr wrap="square" rtlCol="0">
+            <a:spAutoFit/>
+          </a:bodyPr>
+          <a:lstStyle/>
+          <a:p>
+            <a:pPr algn="ctr"/>
+            <a:r>
+              <a:rPr lang="es-MX" b="1" dirty="0">
+                <a:latin typeface="Montserrat" pitchFamily="2" charset="0"/>
+              </a:rPr>
+              <a:t>Información emitida por radioescuchas</a:t>
+            </a:r>
+          </a:p>
+        </p:txBody>
+      </p:sp>
+      <p:pic>
+        <p:nvPicPr>
+          <p:cNvPr id="3" name="Imagen 2">
+            <a:extLst>
+              <a:ext uri="{FF2B5EF4-FFF2-40B4-BE49-F238E27FC236}">
+                <a16:creationId xmlns:a16="http://schemas.microsoft.com/office/drawing/2014/main" id="{9FFA6354-81B9-3AF6-8B42-14034B29D1F9}"/>
+              </a:ext>
+            </a:extLst>
+          </p:cNvPr>
+          <p:cNvPicPr>
+            <a:picLocks noChangeAspect="1"/>
+          </p:cNvPicPr>
+          <p:nvPr/>
+        </p:nvPicPr>
+        <p:blipFill>
+          <a:blip r:embed="rId2"/>
+          <a:stretch>
+            <a:fillRect/>
+          </a:stretch>
+        </p:blipFill>
+        <p:spPr>
+          <a:xfrm>
+            <a:off x="0" y="725651"/>
+            <a:ext cx="9144000" cy="3835074"/>
+          </a:xfrm>
+          <a:prstGeom prst="rect">
+            <a:avLst/>
+          </a:prstGeom>
+        </p:spPr>
+      </p:pic>
+    </p:spTree>
+    <p:extLst>
+      <p:ext uri="{BB962C8B-B14F-4D97-AF65-F5344CB8AC3E}">
+        <p14:creationId xmlns:p14="http://schemas.microsoft.com/office/powerpoint/2010/main" val="1510467552"/>
+      </p:ext>
+    </p:extLst>
+  </p:cSld>
+  <p:clrMapOvr>
+    <a:masterClrMapping/>
+  </p:clrMapOvr>
+</p:sld>
+</file>
+
+<file path=ppt/slides/slide16.xml><?xml version="1.0" encoding="utf-8"?>
 <p:sld xmlns:a="http://schemas.openxmlformats.org/drawingml/2006/main" xmlns:r="http://schemas.openxmlformats.org/officeDocument/2006/relationships" xmlns:p="http://schemas.openxmlformats.org/presentationml/2006/main">
   <p:cSld>
     <p:spTree>
@@ -7645,10 +7750,10 @@
       </p:sp>
       <p:pic>
         <p:nvPicPr>
-          <p:cNvPr id="5" name="Imagen 4">
+          <p:cNvPr id="7" name="Imagen 6">
             <a:extLst>
               <a:ext uri="{FF2B5EF4-FFF2-40B4-BE49-F238E27FC236}">
-                <a16:creationId xmlns:a16="http://schemas.microsoft.com/office/drawing/2014/main" id="{BC10C9C3-4DCB-5174-1700-9763AE3F8C94}"/>
+                <a16:creationId xmlns:a16="http://schemas.microsoft.com/office/drawing/2014/main" id="{34EC91A9-4CAD-E2D8-9B33-9A9337C5566A}"/>
               </a:ext>
             </a:extLst>
           </p:cNvPr>
@@ -7665,8 +7770,8 @@
         </p:blipFill>
         <p:spPr>
           <a:xfrm>
-            <a:off x="0" y="813864"/>
-            <a:ext cx="9144000" cy="3515771"/>
+            <a:off x="0" y="440453"/>
+            <a:ext cx="9144000" cy="4405470"/>
           </a:xfrm>
           <a:prstGeom prst="rect">
             <a:avLst/>
